--- a/presentations/30.4/School mapping in ESRI imagery.pptx
+++ b/presentations/30.4/School mapping in ESRI imagery.pptx
@@ -5,7 +5,7 @@
     <p:sldMasterId id="2147483684" r:id="rId1"/>
   </p:sldMasterIdLst>
   <p:notesMasterIdLst>
-    <p:notesMasterId r:id="rId9"/>
+    <p:notesMasterId r:id="rId11"/>
   </p:notesMasterIdLst>
   <p:sldIdLst>
     <p:sldId id="256" r:id="rId2"/>
@@ -14,7 +14,9 @@
     <p:sldId id="325" r:id="rId5"/>
     <p:sldId id="326" r:id="rId6"/>
     <p:sldId id="322" r:id="rId7"/>
-    <p:sldId id="315" r:id="rId8"/>
+    <p:sldId id="327" r:id="rId8"/>
+    <p:sldId id="329" r:id="rId9"/>
+    <p:sldId id="315" r:id="rId10"/>
   </p:sldIdLst>
   <p:sldSz cx="12192000" cy="6858000"/>
   <p:notesSz cx="6858000" cy="9144000"/>
@@ -203,7 +205,7 @@
           <a:p>
             <a:fld id="{530B7F9E-A1C3-49A9-9E10-41E48F42B6EF}" type="datetimeFigureOut">
               <a:rPr lang="hr-HR" smtClean="0"/>
-              <a:t>24.4.2025.</a:t>
+              <a:t>28.4.2025.</a:t>
             </a:fld>
             <a:endParaRPr lang="hr-HR"/>
           </a:p>
@@ -697,7 +699,7 @@
           <a:p>
             <a:fld id="{6A232798-267A-4A65-B728-860D168520E9}" type="datetime1">
               <a:rPr lang="hr-HR" smtClean="0"/>
-              <a:t>24.4.2025.</a:t>
+              <a:t>28.4.2025.</a:t>
             </a:fld>
             <a:endParaRPr lang="hr-HR"/>
           </a:p>
@@ -905,7 +907,7 @@
           <a:p>
             <a:fld id="{EA757ED3-79A9-4245-8F0F-F984ABC9CDC0}" type="datetime1">
               <a:rPr lang="hr-HR" smtClean="0"/>
-              <a:t>24.4.2025.</a:t>
+              <a:t>28.4.2025.</a:t>
             </a:fld>
             <a:endParaRPr lang="hr-HR"/>
           </a:p>
@@ -1161,7 +1163,7 @@
           <a:p>
             <a:fld id="{8C531ACD-5387-45BD-B548-1DCDFB961638}" type="datetime1">
               <a:rPr lang="hr-HR" smtClean="0"/>
-              <a:t>24.4.2025.</a:t>
+              <a:t>28.4.2025.</a:t>
             </a:fld>
             <a:endParaRPr lang="hr-HR"/>
           </a:p>
@@ -1331,7 +1333,7 @@
           <a:p>
             <a:fld id="{F119952B-35CB-45F4-B445-93E96AE6AA9A}" type="datetime1">
               <a:rPr lang="hr-HR" smtClean="0"/>
-              <a:t>24.4.2025.</a:t>
+              <a:t>28.4.2025.</a:t>
             </a:fld>
             <a:endParaRPr lang="hr-HR"/>
           </a:p>
@@ -1674,7 +1676,7 @@
           <a:p>
             <a:fld id="{95196C6A-72C5-452A-B645-74DCDF4F800D}" type="datetime1">
               <a:rPr lang="hr-HR" smtClean="0"/>
-              <a:t>24.4.2025.</a:t>
+              <a:t>28.4.2025.</a:t>
             </a:fld>
             <a:endParaRPr lang="hr-HR"/>
           </a:p>
@@ -1949,7 +1951,7 @@
           <a:p>
             <a:fld id="{1C206E91-FFF8-4AB3-8240-55376CB7D14E}" type="datetime1">
               <a:rPr lang="hr-HR" smtClean="0"/>
-              <a:t>24.4.2025.</a:t>
+              <a:t>28.4.2025.</a:t>
             </a:fld>
             <a:endParaRPr lang="hr-HR"/>
           </a:p>
@@ -2328,7 +2330,7 @@
           <a:p>
             <a:fld id="{292B5B90-9CB0-4409-89A2-DA39566333B9}" type="datetime1">
               <a:rPr lang="hr-HR" smtClean="0"/>
-              <a:t>24.4.2025.</a:t>
+              <a:t>28.4.2025.</a:t>
             </a:fld>
             <a:endParaRPr lang="hr-HR"/>
           </a:p>
@@ -2446,7 +2448,7 @@
           <a:p>
             <a:fld id="{3C00C004-70F7-4C97-9947-702C175B2047}" type="datetime1">
               <a:rPr lang="hr-HR" smtClean="0"/>
-              <a:t>24.4.2025.</a:t>
+              <a:t>28.4.2025.</a:t>
             </a:fld>
             <a:endParaRPr lang="hr-HR"/>
           </a:p>
@@ -2617,7 +2619,7 @@
           <a:p>
             <a:fld id="{35847105-24BD-4206-BE09-6051D8DF5A30}" type="datetime1">
               <a:rPr lang="hr-HR" smtClean="0"/>
-              <a:t>24.4.2025.</a:t>
+              <a:t>28.4.2025.</a:t>
             </a:fld>
             <a:endParaRPr lang="hr-HR"/>
           </a:p>
@@ -2971,7 +2973,7 @@
           <a:p>
             <a:fld id="{6EA9D767-858F-4EC9-ADD3-529928E56913}" type="datetime1">
               <a:rPr lang="hr-HR" smtClean="0"/>
-              <a:t>24.4.2025.</a:t>
+              <a:t>28.4.2025.</a:t>
             </a:fld>
             <a:endParaRPr lang="hr-HR"/>
           </a:p>
@@ -3348,7 +3350,7 @@
           <a:p>
             <a:fld id="{117151D8-37D8-4141-AE5C-976E3A606B5B}" type="datetime1">
               <a:rPr lang="hr-HR" smtClean="0"/>
-              <a:t>24.4.2025.</a:t>
+              <a:t>28.4.2025.</a:t>
             </a:fld>
             <a:endParaRPr lang="hr-HR"/>
           </a:p>
@@ -3635,7 +3637,7 @@
           <a:p>
             <a:fld id="{870FF488-27A0-4035-9B9A-B8D9554714E0}" type="datetime1">
               <a:rPr lang="hr-HR" smtClean="0"/>
-              <a:t>24.4.2025.</a:t>
+              <a:t>28.4.2025.</a:t>
             </a:fld>
             <a:endParaRPr lang="hr-HR"/>
           </a:p>
@@ -5717,6 +5719,350 @@
         <p:cNvPr id="1" name="">
           <a:extLst>
             <a:ext uri="{FF2B5EF4-FFF2-40B4-BE49-F238E27FC236}">
+              <a16:creationId xmlns:a16="http://schemas.microsoft.com/office/drawing/2014/main" id="{506C2A40-7517-D174-E803-0B5DE61DAE42}"/>
+            </a:ext>
+          </a:extLst>
+        </p:cNvPr>
+        <p:cNvGrpSpPr/>
+        <p:nvPr/>
+      </p:nvGrpSpPr>
+      <p:grpSpPr>
+        <a:xfrm>
+          <a:off x="0" y="0"/>
+          <a:ext cx="0" cy="0"/>
+          <a:chOff x="0" y="0"/>
+          <a:chExt cx="0" cy="0"/>
+        </a:xfrm>
+      </p:grpSpPr>
+      <p:sp>
+        <p:nvSpPr>
+          <p:cNvPr id="2" name="Title 1">
+            <a:extLst>
+              <a:ext uri="{FF2B5EF4-FFF2-40B4-BE49-F238E27FC236}">
+                <a16:creationId xmlns:a16="http://schemas.microsoft.com/office/drawing/2014/main" id="{498F708F-2549-75DA-1DFB-F4AC2C89230E}"/>
+              </a:ext>
+            </a:extLst>
+          </p:cNvPr>
+          <p:cNvSpPr>
+            <a:spLocks noGrp="1"/>
+          </p:cNvSpPr>
+          <p:nvPr>
+            <p:ph type="title"/>
+          </p:nvPr>
+        </p:nvSpPr>
+        <p:spPr>
+          <a:xfrm>
+            <a:off x="1066800" y="145474"/>
+            <a:ext cx="10058400" cy="767542"/>
+          </a:xfrm>
+        </p:spPr>
+        <p:txBody>
+          <a:bodyPr/>
+          <a:lstStyle/>
+          <a:p>
+            <a:pPr algn="ctr"/>
+            <a:r>
+              <a:rPr lang="en-US" dirty="0"/>
+              <a:t>Hardest Examples, ILL</a:t>
+            </a:r>
+            <a:endParaRPr lang="hr-HR" dirty="0"/>
+          </a:p>
+        </p:txBody>
+      </p:sp>
+      <p:sp>
+        <p:nvSpPr>
+          <p:cNvPr id="4" name="Slide Number Placeholder 3">
+            <a:extLst>
+              <a:ext uri="{FF2B5EF4-FFF2-40B4-BE49-F238E27FC236}">
+                <a16:creationId xmlns:a16="http://schemas.microsoft.com/office/drawing/2014/main" id="{67BACF5B-6EDA-B947-967A-88D94D591722}"/>
+              </a:ext>
+            </a:extLst>
+          </p:cNvPr>
+          <p:cNvSpPr>
+            <a:spLocks noGrp="1"/>
+          </p:cNvSpPr>
+          <p:nvPr>
+            <p:ph type="sldNum" sz="quarter" idx="12"/>
+          </p:nvPr>
+        </p:nvSpPr>
+        <p:spPr/>
+        <p:txBody>
+          <a:bodyPr/>
+          <a:lstStyle/>
+          <a:p>
+            <a:fld id="{5434875C-B374-4DCB-B0EF-B862E54336C8}" type="slidenum">
+              <a:rPr lang="hr-HR" smtClean="0"/>
+              <a:t>7</a:t>
+            </a:fld>
+            <a:endParaRPr lang="hr-HR"/>
+          </a:p>
+        </p:txBody>
+      </p:sp>
+      <p:pic>
+        <p:nvPicPr>
+          <p:cNvPr id="8" name="Picture 7" descr="A collage of a city&#10;&#10;AI-generated content may be incorrect.">
+            <a:extLst>
+              <a:ext uri="{FF2B5EF4-FFF2-40B4-BE49-F238E27FC236}">
+                <a16:creationId xmlns:a16="http://schemas.microsoft.com/office/drawing/2014/main" id="{7BACA3A0-F1F5-8BAD-6AA0-230ED0474274}"/>
+              </a:ext>
+            </a:extLst>
+          </p:cNvPr>
+          <p:cNvPicPr>
+            <a:picLocks noChangeAspect="1"/>
+          </p:cNvPicPr>
+          <p:nvPr/>
+        </p:nvPicPr>
+        <p:blipFill>
+          <a:blip r:embed="rId2">
+            <a:extLst>
+              <a:ext uri="{28A0092B-C50C-407E-A947-70E740481C1C}">
+                <a14:useLocalDpi xmlns:a14="http://schemas.microsoft.com/office/drawing/2010/main" val="0"/>
+              </a:ext>
+            </a:extLst>
+          </a:blip>
+          <a:stretch>
+            <a:fillRect/>
+          </a:stretch>
+        </p:blipFill>
+        <p:spPr>
+          <a:xfrm>
+            <a:off x="-929641" y="996143"/>
+            <a:ext cx="14051282" cy="3193473"/>
+          </a:xfrm>
+          <a:prstGeom prst="rect">
+            <a:avLst/>
+          </a:prstGeom>
+        </p:spPr>
+      </p:pic>
+      <p:pic>
+        <p:nvPicPr>
+          <p:cNvPr id="6" name="Picture 5" descr="A collage of a city&#10;&#10;AI-generated content may be incorrect.">
+            <a:extLst>
+              <a:ext uri="{FF2B5EF4-FFF2-40B4-BE49-F238E27FC236}">
+                <a16:creationId xmlns:a16="http://schemas.microsoft.com/office/drawing/2014/main" id="{B2BEF4DC-21A9-5401-75D5-76A6CCF10049}"/>
+              </a:ext>
+            </a:extLst>
+          </p:cNvPr>
+          <p:cNvPicPr>
+            <a:picLocks noChangeAspect="1"/>
+          </p:cNvPicPr>
+          <p:nvPr/>
+        </p:nvPicPr>
+        <p:blipFill>
+          <a:blip r:embed="rId3">
+            <a:extLst>
+              <a:ext uri="{28A0092B-C50C-407E-A947-70E740481C1C}">
+                <a14:useLocalDpi xmlns:a14="http://schemas.microsoft.com/office/drawing/2010/main" val="0"/>
+              </a:ext>
+            </a:extLst>
+          </a:blip>
+          <a:stretch>
+            <a:fillRect/>
+          </a:stretch>
+        </p:blipFill>
+        <p:spPr>
+          <a:xfrm>
+            <a:off x="-929641" y="3686401"/>
+            <a:ext cx="14051282" cy="3193473"/>
+          </a:xfrm>
+          <a:prstGeom prst="rect">
+            <a:avLst/>
+          </a:prstGeom>
+        </p:spPr>
+      </p:pic>
+    </p:spTree>
+    <p:extLst>
+      <p:ext uri="{BB962C8B-B14F-4D97-AF65-F5344CB8AC3E}">
+        <p14:creationId xmlns:p14="http://schemas.microsoft.com/office/powerpoint/2010/main" val="1076033602"/>
+      </p:ext>
+    </p:extLst>
+  </p:cSld>
+  <p:clrMapOvr>
+    <a:masterClrMapping/>
+  </p:clrMapOvr>
+</p:sld>
+</file>
+
+<file path=ppt/slides/slide8.xml><?xml version="1.0" encoding="utf-8"?>
+<p:sld xmlns:a="http://schemas.openxmlformats.org/drawingml/2006/main" xmlns:r="http://schemas.openxmlformats.org/officeDocument/2006/relationships" xmlns:p="http://schemas.openxmlformats.org/presentationml/2006/main">
+  <p:cSld>
+    <p:spTree>
+      <p:nvGrpSpPr>
+        <p:cNvPr id="1" name="">
+          <a:extLst>
+            <a:ext uri="{FF2B5EF4-FFF2-40B4-BE49-F238E27FC236}">
+              <a16:creationId xmlns:a16="http://schemas.microsoft.com/office/drawing/2014/main" id="{F1CE2BA7-C7AE-C088-FB30-A66820A201BD}"/>
+            </a:ext>
+          </a:extLst>
+        </p:cNvPr>
+        <p:cNvGrpSpPr/>
+        <p:nvPr/>
+      </p:nvGrpSpPr>
+      <p:grpSpPr>
+        <a:xfrm>
+          <a:off x="0" y="0"/>
+          <a:ext cx="0" cy="0"/>
+          <a:chOff x="0" y="0"/>
+          <a:chExt cx="0" cy="0"/>
+        </a:xfrm>
+      </p:grpSpPr>
+      <p:pic>
+        <p:nvPicPr>
+          <p:cNvPr id="9" name="Picture 8">
+            <a:extLst>
+              <a:ext uri="{FF2B5EF4-FFF2-40B4-BE49-F238E27FC236}">
+                <a16:creationId xmlns:a16="http://schemas.microsoft.com/office/drawing/2014/main" id="{56B5E331-F305-30AD-1338-CCC34B97C1D5}"/>
+              </a:ext>
+            </a:extLst>
+          </p:cNvPr>
+          <p:cNvPicPr>
+            <a:picLocks noChangeAspect="1"/>
+          </p:cNvPicPr>
+          <p:nvPr/>
+        </p:nvPicPr>
+        <p:blipFill>
+          <a:blip r:embed="rId2">
+            <a:extLst>
+              <a:ext uri="{28A0092B-C50C-407E-A947-70E740481C1C}">
+                <a14:useLocalDpi xmlns:a14="http://schemas.microsoft.com/office/drawing/2010/main" val="0"/>
+              </a:ext>
+            </a:extLst>
+          </a:blip>
+          <a:stretch>
+            <a:fillRect/>
+          </a:stretch>
+        </p:blipFill>
+        <p:spPr>
+          <a:xfrm>
+            <a:off x="-929641" y="996143"/>
+            <a:ext cx="14051282" cy="3193473"/>
+          </a:xfrm>
+          <a:prstGeom prst="rect">
+            <a:avLst/>
+          </a:prstGeom>
+        </p:spPr>
+      </p:pic>
+      <p:sp>
+        <p:nvSpPr>
+          <p:cNvPr id="2" name="Title 1">
+            <a:extLst>
+              <a:ext uri="{FF2B5EF4-FFF2-40B4-BE49-F238E27FC236}">
+                <a16:creationId xmlns:a16="http://schemas.microsoft.com/office/drawing/2014/main" id="{58B08B39-3491-5B52-0620-4590A5B9BDDD}"/>
+              </a:ext>
+            </a:extLst>
+          </p:cNvPr>
+          <p:cNvSpPr>
+            <a:spLocks noGrp="1"/>
+          </p:cNvSpPr>
+          <p:nvPr>
+            <p:ph type="title"/>
+          </p:nvPr>
+        </p:nvSpPr>
+        <p:spPr>
+          <a:xfrm>
+            <a:off x="1066800" y="145474"/>
+            <a:ext cx="10058400" cy="767542"/>
+          </a:xfrm>
+        </p:spPr>
+        <p:txBody>
+          <a:bodyPr/>
+          <a:lstStyle/>
+          <a:p>
+            <a:pPr algn="ctr"/>
+            <a:r>
+              <a:rPr lang="en-US"/>
+              <a:t>Hardest Examples, Prior Best</a:t>
+            </a:r>
+            <a:endParaRPr lang="hr-HR" dirty="0"/>
+          </a:p>
+        </p:txBody>
+      </p:sp>
+      <p:sp>
+        <p:nvSpPr>
+          <p:cNvPr id="4" name="Slide Number Placeholder 3">
+            <a:extLst>
+              <a:ext uri="{FF2B5EF4-FFF2-40B4-BE49-F238E27FC236}">
+                <a16:creationId xmlns:a16="http://schemas.microsoft.com/office/drawing/2014/main" id="{ACC6B69C-79AA-6704-0490-0A34C26C0249}"/>
+              </a:ext>
+            </a:extLst>
+          </p:cNvPr>
+          <p:cNvSpPr>
+            <a:spLocks noGrp="1"/>
+          </p:cNvSpPr>
+          <p:nvPr>
+            <p:ph type="sldNum" sz="quarter" idx="12"/>
+          </p:nvPr>
+        </p:nvSpPr>
+        <p:spPr/>
+        <p:txBody>
+          <a:bodyPr/>
+          <a:lstStyle/>
+          <a:p>
+            <a:fld id="{5434875C-B374-4DCB-B0EF-B862E54336C8}" type="slidenum">
+              <a:rPr lang="hr-HR" smtClean="0"/>
+              <a:t>8</a:t>
+            </a:fld>
+            <a:endParaRPr lang="hr-HR"/>
+          </a:p>
+        </p:txBody>
+      </p:sp>
+      <p:pic>
+        <p:nvPicPr>
+          <p:cNvPr id="5" name="Picture 4">
+            <a:extLst>
+              <a:ext uri="{FF2B5EF4-FFF2-40B4-BE49-F238E27FC236}">
+                <a16:creationId xmlns:a16="http://schemas.microsoft.com/office/drawing/2014/main" id="{5EC5BC97-6FA4-BDCC-D22D-61B1D561CEBC}"/>
+              </a:ext>
+            </a:extLst>
+          </p:cNvPr>
+          <p:cNvPicPr>
+            <a:picLocks noChangeAspect="1"/>
+          </p:cNvPicPr>
+          <p:nvPr/>
+        </p:nvPicPr>
+        <p:blipFill>
+          <a:blip r:embed="rId3">
+            <a:extLst>
+              <a:ext uri="{28A0092B-C50C-407E-A947-70E740481C1C}">
+                <a14:useLocalDpi xmlns:a14="http://schemas.microsoft.com/office/drawing/2010/main" val="0"/>
+              </a:ext>
+            </a:extLst>
+          </a:blip>
+          <a:stretch>
+            <a:fillRect/>
+          </a:stretch>
+        </p:blipFill>
+        <p:spPr>
+          <a:xfrm>
+            <a:off x="-929641" y="3675066"/>
+            <a:ext cx="14051282" cy="3193474"/>
+          </a:xfrm>
+          <a:prstGeom prst="rect">
+            <a:avLst/>
+          </a:prstGeom>
+        </p:spPr>
+      </p:pic>
+    </p:spTree>
+    <p:extLst>
+      <p:ext uri="{BB962C8B-B14F-4D97-AF65-F5344CB8AC3E}">
+        <p14:creationId xmlns:p14="http://schemas.microsoft.com/office/powerpoint/2010/main" val="612632228"/>
+      </p:ext>
+    </p:extLst>
+  </p:cSld>
+  <p:clrMapOvr>
+    <a:masterClrMapping/>
+  </p:clrMapOvr>
+</p:sld>
+</file>
+
+<file path=ppt/slides/slide9.xml><?xml version="1.0" encoding="utf-8"?>
+<p:sld xmlns:a="http://schemas.openxmlformats.org/drawingml/2006/main" xmlns:r="http://schemas.openxmlformats.org/officeDocument/2006/relationships" xmlns:p="http://schemas.openxmlformats.org/presentationml/2006/main">
+  <p:cSld>
+    <p:spTree>
+      <p:nvGrpSpPr>
+        <p:cNvPr id="1" name="">
+          <a:extLst>
+            <a:ext uri="{FF2B5EF4-FFF2-40B4-BE49-F238E27FC236}">
               <a16:creationId xmlns:a16="http://schemas.microsoft.com/office/drawing/2014/main" id="{92A1FFC6-64BB-C03A-47C4-410C039A9904}"/>
             </a:ext>
           </a:extLst>
@@ -5848,7 +6194,7 @@
           <a:p>
             <a:fld id="{5434875C-B374-4DCB-B0EF-B862E54336C8}" type="slidenum">
               <a:rPr lang="hr-HR" smtClean="0"/>
-              <a:t>7</a:t>
+              <a:t>9</a:t>
             </a:fld>
             <a:endParaRPr lang="hr-HR"/>
           </a:p>

--- a/presentations/30.4/School mapping in ESRI imagery.pptx
+++ b/presentations/30.4/School mapping in ESRI imagery.pptx
@@ -205,7 +205,7 @@
           <a:p>
             <a:fld id="{530B7F9E-A1C3-49A9-9E10-41E48F42B6EF}" type="datetimeFigureOut">
               <a:rPr lang="hr-HR" smtClean="0"/>
-              <a:t>28.4.2025.</a:t>
+              <a:t>29.4.2025.</a:t>
             </a:fld>
             <a:endParaRPr lang="hr-HR"/>
           </a:p>
@@ -699,7 +699,7 @@
           <a:p>
             <a:fld id="{6A232798-267A-4A65-B728-860D168520E9}" type="datetime1">
               <a:rPr lang="hr-HR" smtClean="0"/>
-              <a:t>28.4.2025.</a:t>
+              <a:t>29.4.2025.</a:t>
             </a:fld>
             <a:endParaRPr lang="hr-HR"/>
           </a:p>
@@ -907,7 +907,7 @@
           <a:p>
             <a:fld id="{EA757ED3-79A9-4245-8F0F-F984ABC9CDC0}" type="datetime1">
               <a:rPr lang="hr-HR" smtClean="0"/>
-              <a:t>28.4.2025.</a:t>
+              <a:t>29.4.2025.</a:t>
             </a:fld>
             <a:endParaRPr lang="hr-HR"/>
           </a:p>
@@ -1163,7 +1163,7 @@
           <a:p>
             <a:fld id="{8C531ACD-5387-45BD-B548-1DCDFB961638}" type="datetime1">
               <a:rPr lang="hr-HR" smtClean="0"/>
-              <a:t>28.4.2025.</a:t>
+              <a:t>29.4.2025.</a:t>
             </a:fld>
             <a:endParaRPr lang="hr-HR"/>
           </a:p>
@@ -1333,7 +1333,7 @@
           <a:p>
             <a:fld id="{F119952B-35CB-45F4-B445-93E96AE6AA9A}" type="datetime1">
               <a:rPr lang="hr-HR" smtClean="0"/>
-              <a:t>28.4.2025.</a:t>
+              <a:t>29.4.2025.</a:t>
             </a:fld>
             <a:endParaRPr lang="hr-HR"/>
           </a:p>
@@ -1676,7 +1676,7 @@
           <a:p>
             <a:fld id="{95196C6A-72C5-452A-B645-74DCDF4F800D}" type="datetime1">
               <a:rPr lang="hr-HR" smtClean="0"/>
-              <a:t>28.4.2025.</a:t>
+              <a:t>29.4.2025.</a:t>
             </a:fld>
             <a:endParaRPr lang="hr-HR"/>
           </a:p>
@@ -1951,7 +1951,7 @@
           <a:p>
             <a:fld id="{1C206E91-FFF8-4AB3-8240-55376CB7D14E}" type="datetime1">
               <a:rPr lang="hr-HR" smtClean="0"/>
-              <a:t>28.4.2025.</a:t>
+              <a:t>29.4.2025.</a:t>
             </a:fld>
             <a:endParaRPr lang="hr-HR"/>
           </a:p>
@@ -2330,7 +2330,7 @@
           <a:p>
             <a:fld id="{292B5B90-9CB0-4409-89A2-DA39566333B9}" type="datetime1">
               <a:rPr lang="hr-HR" smtClean="0"/>
-              <a:t>28.4.2025.</a:t>
+              <a:t>29.4.2025.</a:t>
             </a:fld>
             <a:endParaRPr lang="hr-HR"/>
           </a:p>
@@ -2448,7 +2448,7 @@
           <a:p>
             <a:fld id="{3C00C004-70F7-4C97-9947-702C175B2047}" type="datetime1">
               <a:rPr lang="hr-HR" smtClean="0"/>
-              <a:t>28.4.2025.</a:t>
+              <a:t>29.4.2025.</a:t>
             </a:fld>
             <a:endParaRPr lang="hr-HR"/>
           </a:p>
@@ -2619,7 +2619,7 @@
           <a:p>
             <a:fld id="{35847105-24BD-4206-BE09-6051D8DF5A30}" type="datetime1">
               <a:rPr lang="hr-HR" smtClean="0"/>
-              <a:t>28.4.2025.</a:t>
+              <a:t>29.4.2025.</a:t>
             </a:fld>
             <a:endParaRPr lang="hr-HR"/>
           </a:p>
@@ -2973,7 +2973,7 @@
           <a:p>
             <a:fld id="{6EA9D767-858F-4EC9-ADD3-529928E56913}" type="datetime1">
               <a:rPr lang="hr-HR" smtClean="0"/>
-              <a:t>28.4.2025.</a:t>
+              <a:t>29.4.2025.</a:t>
             </a:fld>
             <a:endParaRPr lang="hr-HR"/>
           </a:p>
@@ -3350,7 +3350,7 @@
           <a:p>
             <a:fld id="{117151D8-37D8-4141-AE5C-976E3A606B5B}" type="datetime1">
               <a:rPr lang="hr-HR" smtClean="0"/>
-              <a:t>28.4.2025.</a:t>
+              <a:t>29.4.2025.</a:t>
             </a:fld>
             <a:endParaRPr lang="hr-HR"/>
           </a:p>
@@ -3637,7 +3637,7 @@
           <a:p>
             <a:fld id="{870FF488-27A0-4035-9B9A-B8D9554714E0}" type="datetime1">
               <a:rPr lang="hr-HR" smtClean="0"/>
-              <a:t>28.4.2025.</a:t>
+              <a:t>29.4.2025.</a:t>
             </a:fld>
             <a:endParaRPr lang="hr-HR"/>
           </a:p>
@@ -5210,7 +5210,7 @@
             </a:r>
             <a:r>
               <a:rPr lang="en-US" sz="2400" b="1" dirty="0"/>
-              <a:t>results on wide dataset</a:t>
+              <a:t>performance on Marin’s narrow (exhaustive) dataset</a:t>
             </a:r>
           </a:p>
           <a:p>
@@ -5221,13 +5221,8 @@
             <a:pPr lvl="1"/>
             <a:r>
               <a:rPr lang="en-US" sz="2400" dirty="0"/>
-              <a:t>Compare with prior </a:t>
-            </a:r>
-            <a:r>
-              <a:rPr lang="en-US" sz="2400"/>
-              <a:t>best method</a:t>
-            </a:r>
-            <a:endParaRPr lang="en-US" sz="2400" dirty="0"/>
+              <a:t>Compare with prior best method</a:t>
+            </a:r>
           </a:p>
           <a:p>
             <a:pPr lvl="1"/>
@@ -6142,7 +6137,7 @@
             <a:pPr lvl="1"/>
             <a:r>
               <a:rPr lang="en-US" sz="2400" dirty="0"/>
-              <a:t>Algorithms for noisy label learning help with easy tasks (for example, noisy CIFAR10 classification)</a:t>
+              <a:t>Algorithms for noisy label learning can help on tasks with well-defined visual concepts (for example, noisy CIFAR10 classification)</a:t>
             </a:r>
           </a:p>
           <a:p>
